--- a/docs/MORU-발표자료-v1.1.pptx
+++ b/docs/MORU-발표자료-v1.1.pptx
@@ -3295,7 +3295,7 @@
                 </a:solidFill>
                 <a:latin typeface="Malgun Gothic"/>
               </a:rPr>
-              <a:t>전자정부 표준프레임워크 5.0 환경에서 동작하는 누리집 CMS · 통합검색 · 문서 AI · 업무 팩</a:t>
+              <a:t>전자정부 표준프레임워크 5.0으로 만든 누리집 CMS와 통합검색, 문서 AI, 위원회 업무 팩</a:t>
             </a:r>
           </a:p>
         </p:txBody>
@@ -5131,7 +5131,7 @@
                 </a:solidFill>
                 <a:latin typeface="Malgun Gothic"/>
               </a:rPr>
-              <a:t>운영에 필요한 화면을 처음부터 모두 제공합니다</a:t>
+              <a:t>운영에 쓸 화면이 처음부터 다 들어 있습니다</a:t>
             </a:r>
           </a:p>
         </p:txBody>
@@ -7297,7 +7297,7 @@
                 </a:solidFill>
                 <a:latin typeface="Malgun Gothic"/>
               </a:rPr>
-              <a:t>설정값을 신뢰하지 않고, 자기 자신에게 요청을 보내 측정합니다</a:t>
+              <a:t>설정값만 보고 넘기지 않고, 자기 자신에게 요청을 보내 잽니다</a:t>
             </a:r>
           </a:p>
         </p:txBody>
@@ -7520,7 +7520,7 @@
                 </a:solidFill>
                 <a:latin typeface="Malgun Gothic"/>
               </a:rPr>
-              <a:t>보안 점검 — 항목마다 상태 · 상세 · 조치 방법을 제공합니다. 개발 프로파일이므로 ‘세션 쿠키 Secure’ 항목이 경고로 표시된 상태입니다.</a:t>
+              <a:t>보안 점검 — 항목마다 상태와 상세, 조치 방법을 함께 보여 줍니다. 개발 프로파일이므로 ‘세션 쿠키 Secure’ 항목이 경고로 표시된 상태입니다.</a:t>
             </a:r>
           </a:p>
         </p:txBody>
@@ -9084,7 +9084,7 @@
                           </a:solidFill>
                           <a:latin typeface="Malgun Gothic"/>
                         </a:rPr>
-                        <a:t>비어 있는 PostgreSQL DB(또는 MariaDB, Oracle) 하나를 준비하면 Flyway가 첫 실행 시 테이블 36개를 생성합니다.</a:t>
+                        <a:t>비어 있는 PostgreSQL DB(또는 MariaDB, Oracle) 하나를 준비하면 처음 실행할 때 Flyway가 테이블 36개를 만듭니다.</a:t>
                       </a:r>
                     </a:p>
                   </a:txBody>
@@ -9469,7 +9469,7 @@
                 </a:solidFill>
                 <a:latin typeface="Malgun Gothic"/>
               </a:rPr>
-              <a:t>세 프로세스를 한 대의 서버에 함께 설치하거나 세 대의 서버로 나누어 배치합니다. 클라우드 계정이나 외부 SaaS와는 연동하지 않습니다.</a:t>
+              <a:t>프로세스 세 개를 한 대에 몰아 두어도 되고, 세 대로 나누어도 됩니다. 클라우드 계정이나 외부 SaaS와는 연동하지 않습니다.</a:t>
             </a:r>
           </a:p>
           <a:p>
@@ -9506,7 +9506,7 @@
                 </a:solidFill>
                 <a:latin typeface="Malgun Gothic"/>
               </a:rPr>
-              <a:t>AI 사이드카를 제외하고 core와 portal만 운영하거나, LLM 호출만 DMZ의 squid를 통해 중계합니다.</a:t>
+              <a:t>AI 사이드카를 제외하고 core와 portal만 운영하거나, LLM 호출만 DMZ의 squid로 내보냅니다.</a:t>
             </a:r>
           </a:p>
           <a:p>
@@ -9985,7 +9985,7 @@
                 </a:solidFill>
                 <a:latin typeface="Malgun Gothic"/>
               </a:rPr>
-              <a:t>표준프레임워크 위에 미리 구축해 둔 공공포털</a:t>
+              <a:t>계정부터 문서 AI까지, 처음부터 들어 있습니다</a:t>
             </a:r>
           </a:p>
         </p:txBody>
@@ -10179,7 +10179,7 @@
                 </a:solidFill>
                 <a:latin typeface="Malgun Gothic"/>
               </a:rPr>
-              <a:t>MORU(모루)는 전자정부 표준프레임워크 5.0 실행환경 위에 계정, 권한, 게시판, 첨부, 표준사전, 배치, 콘텐츠, 통합검색, 문서 AI를 미리 탑재한 설치형 제품입니다. 빈 프레임워크에서 개발을 시작할 필요가 없으며, 설치 후 관리 화면에서 기관명과 메뉴, 콘텐츠만 입력하면 곧바로 누리집을 개설할 수 있습니다. 누리집 틀은 디지털정부서비스 UI/UX 가이드라인(KRDS)을 따릅니다.</a:t>
+              <a:t>MORU(모루)는 전자정부 표준프레임워크 5.0으로 만든 설치형 제품입니다. 계정과 권한, 게시판, 첨부, 표준사전, 배치, 콘텐츠, 통합검색, 문서 AI가 처음부터 들어 있습니다. 프레임워크만 받아 놓고 개발을 시작할 일이 없습니다. 설치한 뒤 관리 화면에서 기관명과 메뉴, 콘텐츠만 넣으면 그날로 누리집이 열립니다. 누리집 틀은 디지털정부서비스 UI/UX 가이드라인(KRDS)을 따릅니다.</a:t>
             </a:r>
           </a:p>
         </p:txBody>
@@ -11152,7 +11152,7 @@
                 </a:solidFill>
                 <a:latin typeface="Malgun Gothic"/>
               </a:rPr>
-              <a:t>./deploy/run.sh 한 번으로 세 프로세스가 기동합니다. 로컬 DB는 H2 파일(PostgreSQL 모드), 색인은 SQLite + BM25, 형태소 분석은 Kiwi(pip)를 사용합니다. 도커나 별도 상용 소프트웨어는 필요하지 않습니다. 기관 요구가 있을 때만 어댑터를 환경변수로 켜면 됩니다.</a:t>
+              <a:t>./deploy/run.sh 한 번으로 프로세스 세 개가 뜹니다. 로컬 DB는 H2 파일(PostgreSQL 모드), 색인은 SQLite + BM25, 형태소는 Kiwi(pip)로 가릅니다. 도커도, 따로 사 와야 하는 소프트웨어도 없습니다. 기관 요구가 있을 때만 어댑터를 환경변수로 켜면 됩니다.</a:t>
             </a:r>
           </a:p>
         </p:txBody>
@@ -11298,7 +11298,7 @@
                 </a:solidFill>
                 <a:latin typeface="Malgun Gothic"/>
               </a:rPr>
-              <a:t>프레임워크는 있어도, 그 위에 올릴 제품이 없었습니다</a:t>
+              <a:t>표준프레임워크는 뼈대일 뿐, 살은 사업마다 다시 붙였습니다</a:t>
             </a:r>
           </a:p>
         </p:txBody>
@@ -11492,7 +11492,7 @@
                 </a:solidFill>
                 <a:latin typeface="Malgun Gothic"/>
               </a:rPr>
-              <a:t>표준프레임워크는 프레임워크일 뿐 완성된 제품이 아닙니다. 그래서 사업마다 계정, 권한, 게시판, 첨부파일, 표준사전, 배치를 처음부터 다시 개발해야 했습니다. MORU는 바로 그 빈자리를 채우는 제품입니다.</a:t>
+              <a:t>표준프레임워크는 프레임워크일 뿐, 그대로 쓸 수 있는 제품은 아닙니다. 그래서 사업마다 계정과 권한, 게시판, 첨부파일, 표준사전, 배치를 처음부터 다시 만들어 왔습니다. MORU는 그 일을 미리 해 둔 제품입니다.</a:t>
             </a:r>
           </a:p>
         </p:txBody>
@@ -11909,7 +11909,7 @@
                 </a:solidFill>
                 <a:latin typeface="Malgun Gothic"/>
               </a:rPr>
-              <a:t>‘모루’라는 이름은 대장간에서 쇠를 올려놓고 두드리는 받침쇠에서 따왔습니다. 기관은 이 받침 위에서 자신만의 누리집을 만들어 갑니다.</a:t>
+              <a:t>이름은 대장간에서 달군 쇠를 올려놓고 두드리는 받침쇠 ‘모루’에서 따왔습니다. 기관마다 이 받침 위에서 제 누리집을 벼려 갑니다.</a:t>
             </a:r>
           </a:p>
         </p:txBody>
@@ -12055,7 +12055,7 @@
                 </a:solidFill>
                 <a:latin typeface="Malgun Gothic"/>
               </a:rPr>
-              <a:t>세 개의 프로세스, 외부 제품은 어댑터로 연결</a:t>
+              <a:t>프로세스 셋, 바깥 제품은 어댑터로 붙입니다</a:t>
             </a:r>
           </a:p>
         </p:txBody>
@@ -13170,7 +13170,7 @@
                 </a:solidFill>
                 <a:latin typeface="Malgun Gothic"/>
               </a:rPr>
-              <a:t>정부24와 같은 틀의 누리집 — 기관명·메뉴·콘텐츠만 입력하면 개설</a:t>
+              <a:t>정부24처럼 생긴 누리집 — 기관명과 메뉴, 콘텐츠만 넣으면 열립니다</a:t>
             </a:r>
           </a:p>
         </p:txBody>
@@ -13660,7 +13660,7 @@
                 </a:solidFill>
                 <a:latin typeface="Malgun Gothic"/>
               </a:rPr>
-              <a:t>메뉴·콘텐츠·게시판·회원을 코드 수정 없이 관리 화면에서</a:t>
+              <a:t>메뉴도 콘텐츠도 게시판도, 코드 고치지 않고 관리 화면에서 바꿉니다</a:t>
             </a:r>
           </a:p>
         </p:txBody>
@@ -15317,7 +15317,7 @@
                 </a:solidFill>
                 <a:latin typeface="Malgun Gothic"/>
               </a:rPr>
-              <a:t>통합검색 — 시연 데이터(가상 기관 ‘국립문서정보연구원’) 문서 9건 · 조각 21개에서 ‘기록’ 검색에 4ms가 걸렸습니다. 검색어는 본문 발췌에서 노란색으로 표시됩니다.</a:t>
+              <a:t>통합검색 — 시연 데이터(가상 기관 ‘국립문서정보연구원’) 문서 9건 · 조각 21개에서 ‘기록’ 검색에 4ms가 걸렸습니다. 찾은 말은 본문 발췌에서 노란색으로 짚어 줍니다.</a:t>
             </a:r>
           </a:p>
         </p:txBody>

--- a/docs/MORU-발표자료-v1.1.pptx
+++ b/docs/MORU-발표자료-v1.1.pptx
@@ -11829,7 +11829,7 @@
                 </a:solidFill>
                 <a:latin typeface="Malgun Gothic"/>
               </a:rPr>
-              <a:t>MORU가 미리 탑재해 둔 것</a:t>
+              <a:t>MORU에 이미 들어 있는 것</a:t>
             </a:r>
           </a:p>
         </p:txBody>

--- a/docs/MORU-발표자료-v1.1.pptx
+++ b/docs/MORU-발표자료-v1.1.pptx
@@ -9469,7 +9469,7 @@
                 </a:solidFill>
                 <a:latin typeface="Malgun Gothic"/>
               </a:rPr>
-              <a:t>프로세스 세 개를 한 대에 몰아 두어도 되고, 세 대로 나누어도 됩니다. 클라우드 계정이나 외부 SaaS와는 연동하지 않습니다.</a:t>
+              <a:t>프로세스 세 개를 한 대에 몰아 두어도 되고, 세 대로 나누어도 됩니다. AWS·Azure 같은 클라우드 계정은 필요 없고, 제품이 도는 데 바깥 서비스를 부르지 않습니다. 밖으로 나가는 연결은 기관이 켠 것뿐입니다 — LLM, 문자(SENS), 본인확인, 동영상 게시판의 유튜브 썸네일.</a:t>
             </a:r>
           </a:p>
           <a:p>
@@ -9820,7 +9820,7 @@
                 </a:solidFill>
                 <a:latin typeface="Malgun Gothic"/>
               </a:rPr>
-              <a:t>담당자  ____________________      전화  ____________________      전자우편  ____________________</a:t>
+              <a:t>전자우편  mhb8436@gmail.com</a:t>
             </a:r>
           </a:p>
           <a:p>
@@ -14335,7 +14335,7 @@
                 </a:solidFill>
                 <a:latin typeface="Malgun Gothic"/>
               </a:rPr>
-              <a:t>06 화면 부품 — KRDS React 45종</a:t>
+              <a:t>06 화면 컴포넌트 — KRDS React 45종</a:t>
             </a:r>
           </a:p>
         </p:txBody>
@@ -14377,7 +14377,7 @@
                 </a:solidFill>
                 <a:latin typeface="Malgun Gothic"/>
               </a:rPr>
-              <a:t>화면마다 새로 짜지 않고, 부품 45종으로 조립합니다</a:t>
+              <a:t>화면마다 새로 짜지 않고, 컴포넌트 45종으로 조립합니다</a:t>
             </a:r>
           </a:p>
         </p:txBody>
@@ -14536,7 +14536,7 @@
       </p:sp>
       <p:pic>
         <p:nvPicPr>
-          <p:cNvPr id="9" name="Picture 8" descr="18-부품문서.jpg"/>
+          <p:cNvPr id="9" name="Picture 8" descr="18-컴포넌트문서.jpg"/>
           <p:cNvPicPr>
             <a:picLocks noChangeAspect="1"/>
           </p:cNvPicPr>
@@ -14600,7 +14600,7 @@
                 </a:solidFill>
                 <a:latin typeface="Malgun Gothic"/>
               </a:rPr>
-              <a:t>부품 문서 화면 — 제품 안 /ui 에 있습니다. 부품마다 한 줄 설명과 예제, 코드, ‘이럴 때 쓴다 · 이럴 때 쓰지 않는다’, 변형, 속성 표를 적어 두었습니다.</a:t>
+              <a:t>컴포넌트 문서 화면 — 제품 안 /ui 에 있습니다. 컴포넌트마다 한 줄 설명과 예제, 코드, ‘이럴 때 쓴다 · 이럴 때 쓰지 않는다’, 변형, 속성 표를 적어 두었습니다.</a:t>
             </a:r>
           </a:p>
         </p:txBody>
@@ -14640,7 +14640,7 @@
                           </a:solidFill>
                           <a:latin typeface="Malgun Gothic"/>
                         </a:rPr>
-                        <a:t>부품 45종</a:t>
+                        <a:t>컴포넌트 45종</a:t>
                       </a:r>
                     </a:p>
                   </a:txBody>
@@ -14708,7 +14708,7 @@
                           </a:solidFill>
                           <a:latin typeface="Malgun Gothic"/>
                         </a:rPr>
-                        <a:t>누리집도 관리 화면도 이 부품으로 조립합니다. portal 안에서 부품을 가져다 쓰는 자리가 82곳입니다</a:t>
+                        <a:t>누리집도 관리 화면도 이 컴포넌트로 조립합니다. portal 안에서 컴포넌트를 가져다 쓰는 자리가 82곳입니다</a:t>
                       </a:r>
                     </a:p>
                   </a:txBody>
@@ -14754,7 +14754,7 @@
                           </a:solidFill>
                           <a:latin typeface="Malgun Gothic"/>
                         </a:rPr>
-                        <a:t>드로어 · 토스트 · 콤보박스 · 컨텍스트 메뉴 · 정렬되는 데이터 표 — KRDS 킷이 다루지 않는 업무 화면용 부품을 토큰만 써서 채웠습니다</a:t>
+                        <a:t>드로어 · 토스트 · 콤보박스 · 컨텍스트 메뉴 · 정렬되는 데이터 표 — KRDS 킷이 다루지 않는 업무 화면용 컴포넌트를 토큰만 써서 채웠습니다</a:t>
                       </a:r>
                     </a:p>
                   </a:txBody>
@@ -14892,7 +14892,7 @@
                           </a:solidFill>
                           <a:latin typeface="Malgun Gothic"/>
                         </a:rPr>
-                        <a:t>건너뛰기 링크 · 키보드 조작 · 표 caption · 폼 label 을 부품이 안고 있습니다. axe-core 로 공개 · 관리 화면 26면 점검</a:t>
+                        <a:t>건너뛰기 링크 · 키보드 조작 · 표 caption · 폼 label 을 컴포넌트가 안고 있습니다. axe-core 로 공개 · 관리 화면 26면 점검</a:t>
                       </a:r>
                     </a:p>
                   </a:txBody>

--- a/docs/MORU-발표자료-v1.1.pptx
+++ b/docs/MORU-발표자료-v1.1.pptx
@@ -9469,7 +9469,7 @@
                 </a:solidFill>
                 <a:latin typeface="Malgun Gothic"/>
               </a:rPr>
-              <a:t>프로세스 세 개를 한 대에 몰아 두어도 되고, 세 대로 나누어도 됩니다. AWS·Azure 같은 클라우드 계정은 필요 없고, 제품이 도는 데 바깥 서비스를 부르지 않습니다. 밖으로 나가는 연결은 기관이 켠 것뿐입니다 — LLM, 문자(SENS), 본인확인, 동영상 게시판의 유튜브 썸네일.</a:t>
+              <a:t>프로세스 세 개를 한 대에 모아도 되고, 세 대로 나누어도 됩니다. AWS·Azure 같은 클라우드 계정은 필요 없고, 제품이 동작하는 데 외부 서비스를 호출하지 않습니다. 외부로 나가는 연결은 기관이 켠 것뿐입니다 — LLM, 문자(SENS), 본인확인, 동영상 게시판의 유튜브 썸네일.</a:t>
             </a:r>
           </a:p>
           <a:p>
@@ -11152,7 +11152,7 @@
                 </a:solidFill>
                 <a:latin typeface="Malgun Gothic"/>
               </a:rPr>
-              <a:t>./deploy/run.sh 한 번으로 프로세스 세 개가 뜹니다. 로컬 DB는 H2 파일(PostgreSQL 모드), 색인은 SQLite + BM25, 형태소는 Kiwi(pip)로 가릅니다. 도커도, 따로 사 와야 하는 소프트웨어도 없습니다. 기관 요구가 있을 때만 어댑터를 환경변수로 켜면 됩니다.</a:t>
+              <a:t>./deploy/run.sh 한 번으로 프로세스 세 개가 뜹니다. 로컬 DB는 H2 파일(PostgreSQL 모드), 색인은 SQLite + BM25, 형태소 분석은 Kiwi(pip)로 처리합니다. 도커도, 별도로 구매해야 하는 소프트웨어도 없습니다. 기관 요구가 있을 때만 어댑터를 환경변수로 켜면 됩니다.</a:t>
             </a:r>
           </a:p>
         </p:txBody>
@@ -11492,7 +11492,7 @@
                 </a:solidFill>
                 <a:latin typeface="Malgun Gothic"/>
               </a:rPr>
-              <a:t>표준프레임워크는 프레임워크일 뿐, 그대로 쓸 수 있는 제품은 아닙니다. 그래서 사업마다 계정과 권한, 게시판, 첨부파일, 표준사전, 배치를 처음부터 다시 만들어 왔습니다. MORU는 그 일을 미리 해 둔 제품입니다.</a:t>
+              <a:t>표준프레임워크는 말 그대로 프레임워크이며, 그대로 쓸 수 있는 제품이 아닙니다. 그래서 사업마다 계정과 권한, 게시판, 첨부파일, 표준사전, 배치를 처음부터 다시 만들어 왔습니다. MORU는 그 일을 미리 해 둔 제품입니다.</a:t>
             </a:r>
           </a:p>
         </p:txBody>
@@ -14708,7 +14708,7 @@
                           </a:solidFill>
                           <a:latin typeface="Malgun Gothic"/>
                         </a:rPr>
-                        <a:t>누리집도 관리 화면도 이 컴포넌트로 조립합니다. portal 안에서 컴포넌트를 가져다 쓰는 자리가 82곳입니다</a:t>
+                        <a:t>누리집과 관리 화면을 모두 이 컴포넌트로 조립합니다. portal 안에서 컴포넌트를 가져다 쓰는 자리가 82곳입니다</a:t>
                       </a:r>
                     </a:p>
                   </a:txBody>
@@ -14754,7 +14754,7 @@
                           </a:solidFill>
                           <a:latin typeface="Malgun Gothic"/>
                         </a:rPr>
-                        <a:t>드로어 · 토스트 · 콤보박스 · 컨텍스트 메뉴 · 정렬되는 데이터 표 — KRDS 킷이 다루지 않는 업무 화면용 컴포넌트를 토큰만 써서 채웠습니다</a:t>
+                        <a:t>드로어 · 토스트 · 콤보박스 · 컨텍스트 메뉴 · 정렬되는 데이터 표 — KRDS 킷이 다루지 않는 업무 화면용 컴포넌트를 토큰만으로 채웠습니다</a:t>
                       </a:r>
                     </a:p>
                   </a:txBody>
@@ -14892,7 +14892,7 @@
                           </a:solidFill>
                           <a:latin typeface="Malgun Gothic"/>
                         </a:rPr>
-                        <a:t>건너뛰기 링크 · 키보드 조작 · 표 caption · 폼 label 을 컴포넌트가 안고 있습니다. axe-core 로 공개 · 관리 화면 26면 점검</a:t>
+                        <a:t>건너뛰기 링크 · 키보드 조작 · 표 caption · 폼 label 을 화면마다 따로 붙이지 않아도 됩니다. axe-core 로 공개 · 관리 화면 26면 점검</a:t>
                       </a:r>
                     </a:p>
                   </a:txBody>
